--- a/SplunkTurboEinstieg.pptx
+++ b/SplunkTurboEinstieg.pptx
@@ -114,6 +114,11 @@
       </a:defRPr>
     </a:lvl9pPr>
   </p:defaultTextStyle>
+  <p:extLst>
+    <p:ext uri="{EFAFB233-063F-42B5-8137-9DF3F51BA10A}">
+      <p15:sldGuideLst xmlns:p15="http://schemas.microsoft.com/office/powerpoint/2012/main"/>
+    </p:ext>
+  </p:extLst>
 </p:presentation>
 </file>
 
@@ -199,7 +204,7 @@
           <a:p>
             <a:fld id="{D80423CD-3AFB-2146-BCD8-2D703EADAEF0}" type="datetimeFigureOut">
               <a:rPr lang="en-US" smtClean="0"/>
-              <a:t>6/12/26</a:t>
+              <a:t>6/13/2026</a:t>
             </a:fld>
             <a:endParaRPr lang="en-US"/>
           </a:p>
@@ -1351,7 +1356,7 @@
           <a:p>
             <a:fld id="{496338C6-B134-324E-A48F-6271992211C8}" type="datetimeFigureOut">
               <a:rPr lang="en-US" smtClean="0"/>
-              <a:t>6/12/26</a:t>
+              <a:t>6/13/2026</a:t>
             </a:fld>
             <a:endParaRPr lang="en-US"/>
           </a:p>
@@ -1551,7 +1556,7 @@
           <a:p>
             <a:fld id="{496338C6-B134-324E-A48F-6271992211C8}" type="datetimeFigureOut">
               <a:rPr lang="en-US" smtClean="0"/>
-              <a:t>6/12/26</a:t>
+              <a:t>6/13/2026</a:t>
             </a:fld>
             <a:endParaRPr lang="en-US"/>
           </a:p>
@@ -1761,7 +1766,7 @@
           <a:p>
             <a:fld id="{496338C6-B134-324E-A48F-6271992211C8}" type="datetimeFigureOut">
               <a:rPr lang="en-US" smtClean="0"/>
-              <a:t>6/12/26</a:t>
+              <a:t>6/13/2026</a:t>
             </a:fld>
             <a:endParaRPr lang="en-US"/>
           </a:p>
@@ -1961,7 +1966,7 @@
           <a:p>
             <a:fld id="{496338C6-B134-324E-A48F-6271992211C8}" type="datetimeFigureOut">
               <a:rPr lang="en-US" smtClean="0"/>
-              <a:t>6/12/26</a:t>
+              <a:t>6/13/2026</a:t>
             </a:fld>
             <a:endParaRPr lang="en-US"/>
           </a:p>
@@ -2237,7 +2242,7 @@
           <a:p>
             <a:fld id="{496338C6-B134-324E-A48F-6271992211C8}" type="datetimeFigureOut">
               <a:rPr lang="en-US" smtClean="0"/>
-              <a:t>6/12/26</a:t>
+              <a:t>6/13/2026</a:t>
             </a:fld>
             <a:endParaRPr lang="en-US"/>
           </a:p>
@@ -2505,7 +2510,7 @@
           <a:p>
             <a:fld id="{496338C6-B134-324E-A48F-6271992211C8}" type="datetimeFigureOut">
               <a:rPr lang="en-US" smtClean="0"/>
-              <a:t>6/12/26</a:t>
+              <a:t>6/13/2026</a:t>
             </a:fld>
             <a:endParaRPr lang="en-US"/>
           </a:p>
@@ -2920,7 +2925,7 @@
           <a:p>
             <a:fld id="{496338C6-B134-324E-A48F-6271992211C8}" type="datetimeFigureOut">
               <a:rPr lang="en-US" smtClean="0"/>
-              <a:t>6/12/26</a:t>
+              <a:t>6/13/2026</a:t>
             </a:fld>
             <a:endParaRPr lang="en-US"/>
           </a:p>
@@ -3062,7 +3067,7 @@
           <a:p>
             <a:fld id="{496338C6-B134-324E-A48F-6271992211C8}" type="datetimeFigureOut">
               <a:rPr lang="en-US" smtClean="0"/>
-              <a:t>6/12/26</a:t>
+              <a:t>6/13/2026</a:t>
             </a:fld>
             <a:endParaRPr lang="en-US"/>
           </a:p>
@@ -3175,7 +3180,7 @@
           <a:p>
             <a:fld id="{496338C6-B134-324E-A48F-6271992211C8}" type="datetimeFigureOut">
               <a:rPr lang="en-US" smtClean="0"/>
-              <a:t>6/12/26</a:t>
+              <a:t>6/13/2026</a:t>
             </a:fld>
             <a:endParaRPr lang="en-US"/>
           </a:p>
@@ -3488,7 +3493,7 @@
           <a:p>
             <a:fld id="{496338C6-B134-324E-A48F-6271992211C8}" type="datetimeFigureOut">
               <a:rPr lang="en-US" smtClean="0"/>
-              <a:t>6/12/26</a:t>
+              <a:t>6/13/2026</a:t>
             </a:fld>
             <a:endParaRPr lang="en-US"/>
           </a:p>
@@ -3777,7 +3782,7 @@
           <a:p>
             <a:fld id="{496338C6-B134-324E-A48F-6271992211C8}" type="datetimeFigureOut">
               <a:rPr lang="en-US" smtClean="0"/>
-              <a:t>6/12/26</a:t>
+              <a:t>6/13/2026</a:t>
             </a:fld>
             <a:endParaRPr lang="en-US"/>
           </a:p>
@@ -4020,7 +4025,7 @@
           <a:p>
             <a:fld id="{496338C6-B134-324E-A48F-6271992211C8}" type="datetimeFigureOut">
               <a:rPr lang="en-US" smtClean="0"/>
-              <a:t>6/12/26</a:t>
+              <a:t>6/13/2026</a:t>
             </a:fld>
             <a:endParaRPr lang="en-US"/>
           </a:p>
@@ -5518,13 +5523,8 @@
           <a:p>
             <a:r>
               <a:rPr lang="de-DE" dirty="0"/>
-              <a:t>Netzwerkaktivitäten in Echtzeit zu überwachen, Bedrohungen schneller zu erkennen und </a:t>
-            </a:r>
-            <a:r>
-              <a:rPr lang="de-DE" dirty="0" err="1"/>
-              <a:t>Vortälle</a:t>
-            </a:r>
-            <a:endParaRPr lang="de-DE" dirty="0"/>
+              <a:t>Netzwerkaktivitäten in Echtzeit zu überwachen, Bedrohungen schneller zu erkennen und Vorfälle</a:t>
+            </a:r>
           </a:p>
           <a:p>
             <a:r>
